--- a/FMCG.pptx
+++ b/FMCG.pptx
@@ -1507,8 +1507,8 @@
         </p:nvSpPr>
         <p:spPr>
           <a:xfrm>
-            <a:off x="777240" y="5116068"/>
-            <a:ext cx="2743200" cy="411480"/>
+            <a:off x="822960" y="4617720"/>
+            <a:ext cx="2743200" cy="1280160"/>
           </a:xfrm>
           <a:prstGeom prst="rect">
             <a:avLst/>
@@ -1523,7 +1523,7 @@
             <a:pPr marL="0" indent="0">
               <a:buNone/>
             </a:pPr>
-            <a:r>
+            <a:br>
               <a:rPr lang="en-US" sz="1500" b="1" dirty="0">
                 <a:solidFill>
                   <a:srgbClr val="FFFFFF"/>
@@ -1532,9 +1532,8 @@
                 <a:ea typeface="Calibri" pitchFamily="34" charset="-122"/>
                 <a:cs typeface="Calibri" pitchFamily="34" charset="-120"/>
               </a:rPr>
-              <a:t>Bhoomi Sharma </a:t>
-            </a:r>
-            <a:br>
+            </a:br>
+            <a:r>
               <a:rPr lang="en-US" sz="1500" b="1" dirty="0">
                 <a:solidFill>
                   <a:srgbClr val="FFFFFF"/>
@@ -1543,8 +1542,9 @@
                 <a:ea typeface="Calibri" pitchFamily="34" charset="-122"/>
                 <a:cs typeface="Calibri" pitchFamily="34" charset="-120"/>
               </a:rPr>
-            </a:br>
-            <a:r>
+              <a:t>Shrejal Mishra </a:t>
+            </a:r>
+            <a:br>
               <a:rPr lang="en-US" sz="1500" b="1" dirty="0">
                 <a:solidFill>
                   <a:srgbClr val="FFFFFF"/>
@@ -1553,40 +1553,7 @@
                 <a:ea typeface="Calibri" pitchFamily="34" charset="-122"/>
                 <a:cs typeface="Calibri" pitchFamily="34" charset="-120"/>
               </a:rPr>
-              <a:t>Shrejal Mishra </a:t>
-            </a:r>
-            <a:br>
-              <a:rPr lang="en-US" sz="1500" b="1" dirty="0">
-                <a:solidFill>
-                  <a:srgbClr val="FFFFFF"/>
-                </a:solidFill>
-                <a:latin typeface="Berlin Sans FB Demi" panose="020E0802020502020306" pitchFamily="34" charset="0"/>
-                <a:ea typeface="Calibri" pitchFamily="34" charset="-122"/>
-                <a:cs typeface="Calibri" pitchFamily="34" charset="-120"/>
-              </a:rPr>
             </a:br>
-            <a:r>
-              <a:rPr lang="en-US" sz="1500" b="1" dirty="0">
-                <a:solidFill>
-                  <a:srgbClr val="FFFFFF"/>
-                </a:solidFill>
-                <a:latin typeface="Berlin Sans FB Demi" panose="020E0802020502020306" pitchFamily="34" charset="0"/>
-                <a:ea typeface="Calibri" pitchFamily="34" charset="-122"/>
-                <a:cs typeface="Calibri" pitchFamily="34" charset="-120"/>
-              </a:rPr>
-              <a:t>Sunny </a:t>
-            </a:r>
-            <a:r>
-              <a:rPr lang="en-US" sz="1500" b="1" dirty="0" err="1">
-                <a:solidFill>
-                  <a:srgbClr val="FFFFFF"/>
-                </a:solidFill>
-                <a:latin typeface="Berlin Sans FB Demi" panose="020E0802020502020306" pitchFamily="34" charset="0"/>
-                <a:ea typeface="Calibri" pitchFamily="34" charset="-122"/>
-                <a:cs typeface="Calibri" pitchFamily="34" charset="-120"/>
-              </a:rPr>
-              <a:t>kumar</a:t>
-            </a:r>
             <a:endParaRPr lang="en-US" sz="1500" dirty="0">
               <a:latin typeface="Berlin Sans FB Demi" panose="020E0802020502020306" pitchFamily="34" charset="0"/>
             </a:endParaRPr>
